--- a/public/fun/pack/pptx/talkpro/발표템플릿프리미엄_03_업무보고_세이지크림.pptx
+++ b/public/fun/pack/pptx/talkpro/발표템플릿프리미엄_03_업무보고_세이지크림.pptx
@@ -115,12 +115,12 @@
   <p:extLst>
     <p:ext uri="{521415D9-36F7-43E2-AB2F-B90AF26B5E84}">
       <p14:sectionLst xmlns:p14="http://schemas.microsoft.com/office/powerpoint/2010/main">
-        <p14:section name="시작" id="{1731E2B2-4ED7-409F-ABB7-F5DD021A8DCD}">
+        <p14:section name="시작" id="{669A8B39-8499-4A56-B78F-E02189D62CEF}">
           <p14:sldIdLst>
             <p14:sldId id="256"/>
           </p14:sldIdLst>
         </p14:section>
-        <p14:section name="본문" id="{335C55B2-6B7F-4CB3-BA59-C48523856E58}">
+        <p14:section name="본문" id="{4D38CCC0-3196-40EB-A388-AC942EEB0CB2}">
           <p14:sldIdLst>
             <p14:sldId id="257"/>
             <p14:sldId id="258"/>
@@ -131,7 +131,7 @@
             <p14:sldId id="263"/>
           </p14:sldIdLst>
         </p14:section>
-        <p14:section name="마무리" id="{CFBD8425-6604-402F-8234-9041D543CD33}">
+        <p14:section name="마무리" id="{C26C7450-D132-4B2D-B319-5F6F09343FB4}">
           <p14:sldIdLst>
             <p14:sldId id="264"/>
           </p14:sldIdLst>
@@ -1823,7 +1823,7 @@
             </a:lvl1pPr>
           </a:lstStyle>
           <a:p>
-            <a:fld id="{04FFC031-8C8D-416A-AA16-87ED03E32FD7}" type="slidenum">
+            <a:fld id="{9D1D91E5-9D2D-4BDF-8C5C-BADC3F106BF2}" type="slidenum">
               <a:rPr lang="en-US"/>
               <a:t>‹#›</a:t>
             </a:fld>
@@ -2470,7 +2470,7 @@
             </a:lvl1pPr>
           </a:lstStyle>
           <a:p>
-            <a:fld id="{913D6B38-AC7A-4AFF-97BB-5EBC1DDF3005}" type="slidenum">
+            <a:fld id="{D009731E-13F2-4698-9010-8122EC165383}" type="slidenum">
               <a:rPr lang="en-US"/>
               <a:t>‹#›</a:t>
             </a:fld>
@@ -3161,7 +3161,7 @@
             </a:lvl1pPr>
           </a:lstStyle>
           <a:p>
-            <a:fld id="{6EEE210F-E2A4-4598-9DDD-A40800E5B197}" type="slidenum">
+            <a:fld id="{747E2930-3FE6-4449-A974-87C0AF355C8E}" type="slidenum">
               <a:rPr lang="en-US"/>
               <a:t>‹#›</a:t>
             </a:fld>
@@ -4050,7 +4050,7 @@
           <a:p>
             <a:r>
               <a:rPr lang="ko-KR"/>
-              <a:t>이번 분기 진행 상황을 보고드립니다</a:t>
+              <a:t>지금까지의 진행 상황을 보고드립니다</a:t>
             </a:r>
           </a:p>
         </p:txBody>
@@ -4078,7 +4078,7 @@
           <a:p>
             <a:r>
               <a:rPr lang="ko-KR"/>
-              <a:t>0000. 00. 00</a:t>
+              <a:t>날짜 입력</a:t>
             </a:r>
           </a:p>
         </p:txBody>
@@ -4163,7 +4163,7 @@
           <a:bodyPr/>
           <a:lstStyle/>
           <a:p>
-            <a:fld id="{024DDFC0-9E32-49C5-8187-2B3EDFDA171C}" type="slidenum">
+            <a:fld id="{A20A9B90-A58B-49A1-99B0-6ABEEFBA1F7F}" type="slidenum">
               <a:rPr lang="en-US"/>
               <a:t>‹#›</a:t>
             </a:fld>
@@ -5365,7 +5365,7 @@
           <a:bodyPr/>
           <a:lstStyle/>
           <a:p>
-            <a:fld id="{A5058992-CE38-44E7-AB10-9CF98F0EF7E3}" type="slidenum">
+            <a:fld id="{0B074939-935E-4E21-93B1-36B6BFDDEA0D}" type="slidenum">
               <a:rPr lang="en-US"/>
               <a:t>‹#›</a:t>
             </a:fld>
@@ -5453,7 +5453,7 @@
           <a:bodyPr/>
           <a:lstStyle/>
           <a:p>
-            <a:fld id="{49854FB4-A1A9-4D6B-AD91-DD39CFAA0BE0}" type="slidenum">
+            <a:fld id="{8D6A8292-CF95-44F2-A8B3-BCF332B4E84E}" type="slidenum">
               <a:rPr lang="en-US"/>
               <a:t>‹#›</a:t>
             </a:fld>
@@ -6426,7 +6426,7 @@
           <a:bodyPr/>
           <a:lstStyle/>
           <a:p>
-            <a:fld id="{F182BD3E-857B-4B0E-9B85-45D076121206}" type="slidenum">
+            <a:fld id="{F2B8E1D8-DD03-40A8-9C5D-A36DADF0861F}" type="slidenum">
               <a:rPr lang="en-US"/>
               <a:t>‹#›</a:t>
             </a:fld>
@@ -7074,7 +7074,7 @@
           <a:bodyPr/>
           <a:lstStyle/>
           <a:p>
-            <a:fld id="{E4CFE209-AC95-4647-983C-C6D264BAA346}" type="slidenum">
+            <a:fld id="{F23E311E-7CD3-4EE4-B23A-DD5B4D109DB6}" type="slidenum">
               <a:rPr lang="en-US"/>
               <a:t>‹#›</a:t>
             </a:fld>
@@ -7257,7 +7257,7 @@
           <a:bodyPr/>
           <a:lstStyle/>
           <a:p>
-            <a:fld id="{65EC96A2-6409-4C71-A2E1-ECF32BEFC96F}" type="slidenum">
+            <a:fld id="{E93E4139-F81A-4386-AB21-C4D943A09B42}" type="slidenum">
               <a:rPr lang="en-US"/>
               <a:t>‹#›</a:t>
             </a:fld>
@@ -8321,7 +8321,7 @@
           <a:bodyPr/>
           <a:lstStyle/>
           <a:p>
-            <a:fld id="{23878171-771C-4CD7-900C-F9E91837D94D}" type="slidenum">
+            <a:fld id="{8389EBD3-2705-4B5F-9492-153650DD55E2}" type="slidenum">
               <a:rPr lang="en-US"/>
               <a:t>‹#›</a:t>
             </a:fld>
